--- a/docs/SK_Series_Introduction.pptx
+++ b/docs/SK_Series_Introduction.pptx
@@ -1408,7 +1408,7 @@
                 <a:ea typeface="Calibri" pitchFamily="34" charset="-122"/>
                 <a:cs typeface="Calibri" pitchFamily="34" charset="-120"/>
               </a:rPr>
-              <a:t>From basic LLM API calls to engineering enterprise-grade, autonomous multi-agent systems — built entirely on Microsoft Semantic Kernel and Google Gemini, with a Production-First mindset.</a:t>
+              <a:t>From basic LLM API calls to engineering enterprise-grade, autonomous multi-agent systems — built entirely on Microsoft Semantic Kernel and OpenAI, with a Production-First mindset.</a:t>
             </a:r>
             <a:endParaRPr lang="en-US" sz="1500" dirty="0"/>
           </a:p>
@@ -2020,7 +2020,7 @@
                 <a:ea typeface="Calibri" pitchFamily="34" charset="-122"/>
                 <a:cs typeface="Calibri" pitchFamily="34" charset="-120"/>
               </a:rPr>
-              <a:t>Prof. Bob  •  Foundation for the MAF series  •  100% Gemini-powered, runs free-tier end to end</a:t>
+              <a:t>Prof. Bob  •  Foundation for the MAF series  •  Powered end to end by OpenAI gpt-4.1-mini</a:t>
             </a:r>
             <a:endParaRPr lang="en-US" sz="1050" dirty="0"/>
           </a:p>

--- a/docs/SK_Series_Introduction.pptx
+++ b/docs/SK_Series_Introduction.pptx
@@ -3835,7 +3835,7 @@
                 <a:ea typeface="Calibri" pitchFamily="34" charset="-122"/>
                 <a:cs typeface="Calibri" pitchFamily="34" charset="-120"/>
               </a:rPr>
-              <a:t>Day 13 — The Dynamic Persona (Handlebars Agent)</a:t>
+              <a:t>Day 13 — Prompt Logic Plugins (Dynamic Persona)</a:t>
             </a:r>
             <a:endParaRPr lang="en-US" sz="1150" dirty="0"/>
           </a:p>
